--- a/_ICSE_2027__COT_Analysis/figures/framework.pptx
+++ b/_ICSE_2027__COT_Analysis/figures/framework.pptx
@@ -214,7 +214,7 @@
           <a:p>
             <a:fld id="{0F9B84EA-7D68-4D60-9CB1-D50884785D1C}" type="datetimeFigureOut">
               <a:rPr lang="zh-CN" altLang="en-US" smtClean="0"/>
-              <a:t>2026/6/29</a:t>
+              <a:t>2026/10/2</a:t>
             </a:fld>
             <a:endParaRPr lang="zh-CN" altLang="en-US"/>
           </a:p>
@@ -379,7 +379,7 @@
           <a:p>
             <a:fld id="{D2A48B96-639E-45A3-A0BA-2464DFDB1FAA}" type="datetimeFigureOut">
               <a:rPr lang="zh-CN" altLang="en-US" smtClean="0"/>
-              <a:t>2026/6/29</a:t>
+              <a:t>2026/10/2</a:t>
             </a:fld>
             <a:endParaRPr lang="zh-CN" altLang="en-US"/>
           </a:p>
@@ -885,7 +885,7 @@
           <a:p>
             <a:fld id="{760FBDFE-C587-4B4C-A407-44438C67B59E}" type="datetimeFigureOut">
               <a:rPr lang="zh-CN" altLang="en-US" smtClean="0"/>
-              <a:t>2026/6/29</a:t>
+              <a:t>2026/10/2</a:t>
             </a:fld>
             <a:endParaRPr lang="zh-CN" altLang="en-US"/>
           </a:p>
@@ -1055,7 +1055,7 @@
           <a:p>
             <a:fld id="{760FBDFE-C587-4B4C-A407-44438C67B59E}" type="datetimeFigureOut">
               <a:rPr lang="zh-CN" altLang="en-US" smtClean="0"/>
-              <a:t>2026/6/29</a:t>
+              <a:t>2026/10/2</a:t>
             </a:fld>
             <a:endParaRPr lang="zh-CN" altLang="en-US"/>
           </a:p>
@@ -1235,7 +1235,7 @@
           <a:p>
             <a:fld id="{760FBDFE-C587-4B4C-A407-44438C67B59E}" type="datetimeFigureOut">
               <a:rPr lang="zh-CN" altLang="en-US" smtClean="0"/>
-              <a:t>2026/6/29</a:t>
+              <a:t>2026/10/2</a:t>
             </a:fld>
             <a:endParaRPr lang="zh-CN" altLang="en-US"/>
           </a:p>
@@ -1406,7 +1406,7 @@
           <a:p>
             <a:fld id="{9EFD9D74-47D9-4702-A33C-335B63B48DBF}" type="datetimeFigureOut">
               <a:rPr lang="zh-CN" altLang="en-US" smtClean="0"/>
-              <a:t>2026/6/29</a:t>
+              <a:t>2026/10/2</a:t>
             </a:fld>
             <a:endParaRPr lang="zh-CN" altLang="en-US" dirty="0"/>
           </a:p>
@@ -1530,7 +1530,7 @@
           <a:p>
             <a:fld id="{760FBDFE-C587-4B4C-A407-44438C67B59E}" type="datetimeFigureOut">
               <a:rPr lang="zh-CN" altLang="en-US" smtClean="0"/>
-              <a:t>2026/6/29</a:t>
+              <a:t>2026/10/2</a:t>
             </a:fld>
             <a:endParaRPr lang="zh-CN" altLang="en-US"/>
           </a:p>
@@ -1688,7 +1688,7 @@
           <a:p>
             <a:fld id="{760FBDFE-C587-4B4C-A407-44438C67B59E}" type="datetimeFigureOut">
               <a:rPr lang="zh-CN" altLang="en-US" smtClean="0"/>
-              <a:t>2026/6/29</a:t>
+              <a:t>2026/10/2</a:t>
             </a:fld>
             <a:endParaRPr lang="zh-CN" altLang="en-US"/>
           </a:p>
@@ -1937,7 +1937,7 @@
           <a:p>
             <a:fld id="{760FBDFE-C587-4B4C-A407-44438C67B59E}" type="datetimeFigureOut">
               <a:rPr lang="zh-CN" altLang="en-US" smtClean="0"/>
-              <a:t>2026/6/29</a:t>
+              <a:t>2026/10/2</a:t>
             </a:fld>
             <a:endParaRPr lang="zh-CN" altLang="en-US"/>
           </a:p>
@@ -2183,7 +2183,7 @@
           <a:p>
             <a:fld id="{760FBDFE-C587-4B4C-A407-44438C67B59E}" type="datetimeFigureOut">
               <a:rPr lang="zh-CN" altLang="en-US" smtClean="0"/>
-              <a:t>2026/6/29</a:t>
+              <a:t>2026/10/2</a:t>
             </a:fld>
             <a:endParaRPr lang="zh-CN" altLang="en-US"/>
           </a:p>
@@ -2415,7 +2415,7 @@
           <a:p>
             <a:fld id="{760FBDFE-C587-4B4C-A407-44438C67B59E}" type="datetimeFigureOut">
               <a:rPr lang="zh-CN" altLang="en-US" smtClean="0"/>
-              <a:t>2026/6/29</a:t>
+              <a:t>2026/10/2</a:t>
             </a:fld>
             <a:endParaRPr lang="zh-CN" altLang="en-US"/>
           </a:p>
@@ -2782,7 +2782,7 @@
           <a:p>
             <a:fld id="{760FBDFE-C587-4B4C-A407-44438C67B59E}" type="datetimeFigureOut">
               <a:rPr lang="zh-CN" altLang="en-US" smtClean="0"/>
-              <a:t>2026/6/29</a:t>
+              <a:t>2026/10/2</a:t>
             </a:fld>
             <a:endParaRPr lang="zh-CN" altLang="en-US"/>
           </a:p>
@@ -2900,7 +2900,7 @@
           <a:p>
             <a:fld id="{760FBDFE-C587-4B4C-A407-44438C67B59E}" type="datetimeFigureOut">
               <a:rPr lang="zh-CN" altLang="en-US" smtClean="0"/>
-              <a:t>2026/6/29</a:t>
+              <a:t>2026/10/2</a:t>
             </a:fld>
             <a:endParaRPr lang="zh-CN" altLang="en-US"/>
           </a:p>
@@ -2995,7 +2995,7 @@
           <a:p>
             <a:fld id="{760FBDFE-C587-4B4C-A407-44438C67B59E}" type="datetimeFigureOut">
               <a:rPr lang="zh-CN" altLang="en-US" smtClean="0"/>
-              <a:t>2026/6/29</a:t>
+              <a:t>2026/10/2</a:t>
             </a:fld>
             <a:endParaRPr lang="zh-CN" altLang="en-US"/>
           </a:p>
@@ -3272,7 +3272,7 @@
           <a:p>
             <a:fld id="{760FBDFE-C587-4B4C-A407-44438C67B59E}" type="datetimeFigureOut">
               <a:rPr lang="zh-CN" altLang="en-US" smtClean="0"/>
-              <a:t>2026/6/29</a:t>
+              <a:t>2026/10/2</a:t>
             </a:fld>
             <a:endParaRPr lang="zh-CN" altLang="en-US"/>
           </a:p>
@@ -3529,7 +3529,7 @@
           <a:p>
             <a:fld id="{9EFD9D74-47D9-4702-A33C-335B63B48DBF}" type="datetimeFigureOut">
               <a:rPr lang="zh-CN" altLang="en-US" smtClean="0"/>
-              <a:t>2026/6/29</a:t>
+              <a:t>2026/10/2</a:t>
             </a:fld>
             <a:endParaRPr lang="zh-CN" altLang="en-US" dirty="0"/>
           </a:p>
@@ -3742,7 +3742,7 @@
           <a:p>
             <a:fld id="{760FBDFE-C587-4B4C-A407-44438C67B59E}" type="datetimeFigureOut">
               <a:rPr lang="zh-CN" altLang="en-US" smtClean="0"/>
-              <a:t>2026/6/29</a:t>
+              <a:t>2026/10/2</a:t>
             </a:fld>
             <a:endParaRPr lang="zh-CN" altLang="en-US"/>
           </a:p>
@@ -4800,7 +4800,7 @@
                   <a:latin typeface="Times New Roman Regular" panose="02020503050405090304" charset="0"/>
                   <a:cs typeface="Times New Roman Regular" panose="02020503050405090304" charset="0"/>
                 </a:rPr>
-                <a:t>RQ1: Macro Patterns</a:t>
+                <a:t>RQ1: General Patterns</a:t>
               </a:r>
             </a:p>
             <a:p>
@@ -4872,7 +4872,7 @@
           <p:spPr>
             <a:xfrm>
               <a:off x="14270" y="1858"/>
-              <a:ext cx="3909" cy="1304"/>
+              <a:ext cx="3909" cy="1365"/>
             </a:xfrm>
             <a:prstGeom prst="roundRect">
               <a:avLst>
@@ -4952,7 +4952,19 @@
                   <a:latin typeface="Times New Roman Regular" panose="02020503050405090304" charset="0"/>
                   <a:cs typeface="Times New Roman Regular" panose="02020503050405090304" charset="0"/>
                 </a:rPr>
-                <a:t>RQ2: Micro Patterns</a:t>
+                <a:t>RQ2: Positive and</a:t>
+              </a:r>
+            </a:p>
+            <a:p>
+              <a:r>
+                <a:rPr lang="en-US" altLang="zh-CN" sz="1600" b="1" dirty="0">
+                  <a:solidFill>
+                    <a:srgbClr val="396135"/>
+                  </a:solidFill>
+                  <a:latin typeface="Times New Roman Regular" panose="02020503050405090304" charset="0"/>
+                  <a:cs typeface="Times New Roman Regular" panose="02020503050405090304" charset="0"/>
+                </a:rPr>
+                <a:t>Negative Patterns</a:t>
               </a:r>
             </a:p>
             <a:p>
@@ -4967,17 +4979,7 @@
                   <a:cs typeface="Times New Roman Regular" panose="02020503050405090304" charset="0"/>
                   <a:sym typeface="+mn-ea"/>
                 </a:rPr>
-                <a:t>positive  reasoning patterns</a:t>
-              </a:r>
-            </a:p>
-            <a:p>
-              <a:r>
-                <a:rPr lang="en-US" altLang="zh-CN" sz="1235" b="1" dirty="0">
-                  <a:latin typeface="Times New Roman Regular" panose="02020503050405090304" charset="0"/>
-                  <a:cs typeface="Times New Roman Regular" panose="02020503050405090304" charset="0"/>
-                  <a:sym typeface="+mn-ea"/>
-                </a:rPr>
-                <a:t>reasoning anti-patterns</a:t>
+                <a:t>validity-associated patterns</a:t>
               </a:r>
             </a:p>
           </p:txBody>

--- a/_ICSE_2027__COT_Analysis/figures/framework.pptx
+++ b/_ICSE_2027__COT_Analysis/figures/framework.pptx
@@ -4158,71 +4158,6 @@
       </p:grpSpPr>
       <p:sp>
         <p:nvSpPr>
-          <p:cNvPr id="52" name="矩形: 圆角 63">
-            <a:extLst>
-              <a:ext uri="{FF2B5EF4-FFF2-40B4-BE49-F238E27FC236}">
-                <a16:creationId xmlns:a16="http://schemas.microsoft.com/office/drawing/2014/main" id="{FB1F223D-8C12-EDCA-B148-8AD2E70B4924}"/>
-              </a:ext>
-            </a:extLst>
-          </p:cNvPr>
-          <p:cNvSpPr>
-            <a:spLocks noChangeAspect="1"/>
-          </p:cNvSpPr>
-          <p:nvPr/>
-        </p:nvSpPr>
-        <p:spPr>
-          <a:xfrm>
-            <a:off x="9423253" y="3698877"/>
-            <a:ext cx="2896870" cy="1674495"/>
-          </a:xfrm>
-          <a:prstGeom prst="roundRect">
-            <a:avLst>
-              <a:gd name="adj" fmla="val 0"/>
-            </a:avLst>
-          </a:prstGeom>
-          <a:solidFill>
-            <a:srgbClr val="F9F9F9"/>
-          </a:solidFill>
-          <a:ln w="19050">
-            <a:solidFill>
-              <a:schemeClr val="accent1">
-                <a:lumMod val="20000"/>
-                <a:lumOff val="80000"/>
-              </a:schemeClr>
-            </a:solidFill>
-            <a:prstDash val="sysDash"/>
-          </a:ln>
-        </p:spPr>
-        <p:style>
-          <a:lnRef idx="2">
-            <a:schemeClr val="accent1">
-              <a:shade val="15000"/>
-            </a:schemeClr>
-          </a:lnRef>
-          <a:fillRef idx="1">
-            <a:schemeClr val="accent1"/>
-          </a:fillRef>
-          <a:effectRef idx="0">
-            <a:schemeClr val="accent1"/>
-          </a:effectRef>
-          <a:fontRef idx="minor">
-            <a:schemeClr val="lt1"/>
-          </a:fontRef>
-        </p:style>
-        <p:txBody>
-          <a:bodyPr rtlCol="0" anchor="ctr"/>
-          <a:lstStyle/>
-          <a:p>
-            <a:pPr algn="ctr"/>
-            <a:endParaRPr lang="zh-CN" altLang="en-US" sz="1855" dirty="0">
-              <a:latin typeface="Times New Roman Regular" panose="02020503050405090304" charset="0"/>
-              <a:cs typeface="Times New Roman Regular" panose="02020503050405090304" charset="0"/>
-            </a:endParaRPr>
-          </a:p>
-        </p:txBody>
-      </p:sp>
-      <p:sp>
-        <p:nvSpPr>
           <p:cNvPr id="2" name="矩形: 圆角 63">
             <a:extLst>
               <a:ext uri="{FF2B5EF4-FFF2-40B4-BE49-F238E27FC236}">
@@ -4779,7 +4714,7 @@
           <p:spPr>
             <a:xfrm>
               <a:off x="14477" y="1971"/>
-              <a:ext cx="3170" cy="926"/>
+              <a:ext cx="3382" cy="926"/>
             </a:xfrm>
             <a:prstGeom prst="rect">
               <a:avLst/>
@@ -4804,20 +4739,20 @@
               </a:r>
             </a:p>
             <a:p>
-              <a:pPr>
+              <a:pPr algn="ctr">
                 <a:spcBef>
                   <a:spcPts val="600"/>
                 </a:spcBef>
               </a:pPr>
               <a:r>
-                <a:rPr lang="en-US" altLang="zh-CN" sz="1235" b="1" dirty="0">
+                <a:rPr lang="en-US" altLang="zh-CN" sz="1450" dirty="0">
                   <a:latin typeface="Times New Roman Regular" panose="02020503050405090304" charset="0"/>
                   <a:cs typeface="Times New Roman Regular" panose="02020503050405090304" charset="0"/>
                   <a:sym typeface="+mn-ea"/>
                 </a:rPr>
                 <a:t>task-level reasoning patterns</a:t>
               </a:r>
-              <a:endParaRPr lang="en-US" altLang="zh-CN" sz="1645" b="1" dirty="0">
+              <a:endParaRPr lang="en-US" altLang="zh-CN" sz="1450" dirty="0">
                 <a:solidFill>
                   <a:srgbClr val="396135"/>
                 </a:solidFill>
@@ -4852,9 +4787,9 @@
         <p:grpSpPr>
           <a:xfrm>
             <a:off x="9571507" y="2060012"/>
-            <a:ext cx="2555240" cy="912495"/>
+            <a:ext cx="2555240" cy="892232"/>
             <a:chOff x="14270" y="1858"/>
-            <a:chExt cx="3909" cy="1396"/>
+            <a:chExt cx="3909" cy="1365"/>
           </a:xfrm>
         </p:grpSpPr>
         <p:sp>
@@ -4930,8 +4865,8 @@
           </p:nvSpPr>
           <p:spPr>
             <a:xfrm>
-              <a:off x="14492" y="1949"/>
-              <a:ext cx="3406" cy="1305"/>
+              <a:off x="14349" y="1877"/>
+              <a:ext cx="3802" cy="1305"/>
             </a:xfrm>
             <a:prstGeom prst="rect">
               <a:avLst/>
@@ -4964,177 +4899,22 @@
                   <a:latin typeface="Times New Roman Regular" panose="02020503050405090304" charset="0"/>
                   <a:cs typeface="Times New Roman Regular" panose="02020503050405090304" charset="0"/>
                 </a:rPr>
-                <a:t>Negative Patterns</a:t>
+                <a:t>          Negative Patterns</a:t>
               </a:r>
             </a:p>
             <a:p>
-              <a:pPr>
+              <a:pPr algn="ctr">
                 <a:spcBef>
                   <a:spcPts val="600"/>
                 </a:spcBef>
               </a:pPr>
               <a:r>
-                <a:rPr lang="en-US" altLang="zh-CN" sz="1235" b="1" dirty="0">
+                <a:rPr lang="en-US" altLang="zh-CN" sz="1450" dirty="0">
                   <a:latin typeface="Times New Roman Regular" panose="02020503050405090304" charset="0"/>
                   <a:cs typeface="Times New Roman Regular" panose="02020503050405090304" charset="0"/>
                   <a:sym typeface="+mn-ea"/>
                 </a:rPr>
-                <a:t>validity-associated patterns</a:t>
-              </a:r>
-            </a:p>
-          </p:txBody>
-        </p:sp>
-      </p:grpSp>
-      <p:grpSp>
-        <p:nvGrpSpPr>
-          <p:cNvPr id="187" name="组合 186">
-            <a:extLst>
-              <a:ext uri="{FF2B5EF4-FFF2-40B4-BE49-F238E27FC236}">
-                <a16:creationId xmlns:a16="http://schemas.microsoft.com/office/drawing/2014/main" id="{2A64BC5F-5062-7446-7B80-CE5ACA0083D8}"/>
-              </a:ext>
-            </a:extLst>
-          </p:cNvPr>
-          <p:cNvGrpSpPr>
-            <a:grpSpLocks noChangeAspect="1"/>
-          </p:cNvGrpSpPr>
-          <p:nvPr/>
-        </p:nvGrpSpPr>
-        <p:grpSpPr>
-          <a:xfrm>
-            <a:off x="9570875" y="4141539"/>
-            <a:ext cx="2567541" cy="1098550"/>
-            <a:chOff x="14270" y="1858"/>
-            <a:chExt cx="4067" cy="978"/>
-          </a:xfrm>
-        </p:grpSpPr>
-        <p:sp>
-          <p:nvSpPr>
-            <p:cNvPr id="188" name="圆角矩形 187">
-              <a:extLst>
-                <a:ext uri="{FF2B5EF4-FFF2-40B4-BE49-F238E27FC236}">
-                  <a16:creationId xmlns:a16="http://schemas.microsoft.com/office/drawing/2014/main" id="{C4A9DB26-ED52-BBC6-FBD9-A55268CAC0B7}"/>
-                </a:ext>
-              </a:extLst>
-            </p:cNvPr>
-            <p:cNvSpPr/>
-            <p:nvPr/>
-          </p:nvSpPr>
-          <p:spPr>
-            <a:xfrm>
-              <a:off x="14270" y="1858"/>
-              <a:ext cx="4047" cy="978"/>
-            </a:xfrm>
-            <a:prstGeom prst="roundRect">
-              <a:avLst>
-                <a:gd name="adj" fmla="val 11118"/>
-              </a:avLst>
-            </a:prstGeom>
-            <a:solidFill>
-              <a:srgbClr val="F5FAF4"/>
-            </a:solidFill>
-            <a:ln>
-              <a:solidFill>
-                <a:srgbClr val="678E61"/>
-              </a:solidFill>
-            </a:ln>
-          </p:spPr>
-          <p:style>
-            <a:lnRef idx="2">
-              <a:schemeClr val="accent1">
-                <a:lumMod val="75000"/>
-              </a:schemeClr>
-            </a:lnRef>
-            <a:fillRef idx="1">
-              <a:schemeClr val="accent1"/>
-            </a:fillRef>
-            <a:effectRef idx="0">
-              <a:srgbClr val="FFFFFF"/>
-            </a:effectRef>
-            <a:fontRef idx="minor">
-              <a:schemeClr val="lt1"/>
-            </a:fontRef>
-          </p:style>
-          <p:txBody>
-            <a:bodyPr rtlCol="0" anchor="ctr"/>
-            <a:lstStyle/>
-            <a:p>
-              <a:pPr algn="ctr"/>
-              <a:endParaRPr lang="zh-CN" altLang="en-US" sz="1855">
-                <a:latin typeface="Times New Roman Regular" panose="02020503050405090304" charset="0"/>
-                <a:cs typeface="Times New Roman Regular" panose="02020503050405090304" charset="0"/>
-              </a:endParaRPr>
-            </a:p>
-          </p:txBody>
-        </p:sp>
-        <p:sp>
-          <p:nvSpPr>
-            <p:cNvPr id="189" name="文本框 188">
-              <a:extLst>
-                <a:ext uri="{FF2B5EF4-FFF2-40B4-BE49-F238E27FC236}">
-                  <a16:creationId xmlns:a16="http://schemas.microsoft.com/office/drawing/2014/main" id="{C9564729-7407-D016-4EE4-853B5A5B700A}"/>
-                </a:ext>
-              </a:extLst>
-            </p:cNvPr>
-            <p:cNvSpPr txBox="1"/>
-            <p:nvPr/>
-          </p:nvSpPr>
-          <p:spPr>
-            <a:xfrm>
-              <a:off x="14337" y="1930"/>
-              <a:ext cx="4000" cy="760"/>
-            </a:xfrm>
-            <a:prstGeom prst="rect">
-              <a:avLst/>
-            </a:prstGeom>
-            <a:noFill/>
-          </p:spPr>
-          <p:txBody>
-            <a:bodyPr wrap="square" rtlCol="0">
-              <a:noAutofit/>
-            </a:bodyPr>
-            <a:lstStyle/>
-            <a:p>
-              <a:r>
-                <a:rPr lang="en-US" altLang="zh-CN" sz="1600" b="1" dirty="0">
-                  <a:solidFill>
-                    <a:srgbClr val="396135"/>
-                  </a:solidFill>
-                  <a:latin typeface="Times New Roman Regular" panose="02020503050405090304" charset="0"/>
-                  <a:cs typeface="Times New Roman Regular" panose="02020503050405090304" charset="0"/>
-                </a:rPr>
-                <a:t>RQ3: Pattern Applications</a:t>
-              </a:r>
-            </a:p>
-            <a:p>
-              <a:pPr>
-                <a:spcBef>
-                  <a:spcPts val="600"/>
-                </a:spcBef>
-              </a:pPr>
-              <a:r>
-                <a:rPr lang="en-US" altLang="zh-CN" sz="1235" b="1" dirty="0">
-                  <a:latin typeface="Times New Roman Regular" panose="02020503050405090304" charset="0"/>
-                  <a:cs typeface="Times New Roman Regular" panose="02020503050405090304" charset="0"/>
-                </a:rPr>
-                <a:t>coding task classification</a:t>
-              </a:r>
-            </a:p>
-            <a:p>
-              <a:r>
-                <a:rPr lang="en-US" altLang="zh-CN" sz="1235" b="1" dirty="0">
-                  <a:latin typeface="Times New Roman Regular" panose="02020503050405090304" charset="0"/>
-                  <a:cs typeface="Times New Roman Regular" panose="02020503050405090304" charset="0"/>
-                </a:rPr>
-                <a:t>pattern-guided prompting</a:t>
-              </a:r>
-            </a:p>
-            <a:p>
-              <a:r>
-                <a:rPr lang="en-US" altLang="zh-CN" sz="1235" b="1" dirty="0">
-                  <a:latin typeface="Times New Roman Regular" panose="02020503050405090304" charset="0"/>
-                  <a:cs typeface="Times New Roman Regular" panose="02020503050405090304" charset="0"/>
-                </a:rPr>
-                <a:t>pattern-aware early stopping</a:t>
+                <a:t>action-level reasoning patterns</a:t>
               </a:r>
             </a:p>
           </p:txBody>
@@ -5524,61 +5304,6 @@
               <a:latin typeface="Times New Roman Regular" panose="02020503050405090304" charset="0"/>
               <a:cs typeface="Times New Roman Regular" panose="02020503050405090304" charset="0"/>
             </a:endParaRPr>
-          </a:p>
-        </p:txBody>
-      </p:sp>
-      <p:sp>
-        <p:nvSpPr>
-          <p:cNvPr id="54" name="文本框 53">
-            <a:extLst>
-              <a:ext uri="{FF2B5EF4-FFF2-40B4-BE49-F238E27FC236}">
-                <a16:creationId xmlns:a16="http://schemas.microsoft.com/office/drawing/2014/main" id="{BFC74964-D453-8E2F-AE4A-C5E0D35617AC}"/>
-              </a:ext>
-            </a:extLst>
-          </p:cNvPr>
-          <p:cNvSpPr txBox="1">
-            <a:spLocks noChangeAspect="1"/>
-          </p:cNvSpPr>
-          <p:nvPr/>
-        </p:nvSpPr>
-        <p:spPr>
-          <a:xfrm>
-            <a:off x="9216589" y="3701484"/>
-            <a:ext cx="3278505" cy="338554"/>
-          </a:xfrm>
-          <a:prstGeom prst="rect">
-            <a:avLst/>
-          </a:prstGeom>
-          <a:noFill/>
-        </p:spPr>
-        <p:txBody>
-          <a:bodyPr wrap="square" rtlCol="0">
-            <a:spAutoFit/>
-          </a:bodyPr>
-          <a:lstStyle/>
-          <a:p>
-            <a:pPr algn="ctr"/>
-            <a:r>
-              <a:rPr lang="en-US" altLang="zh-CN" sz="1600" b="1" dirty="0">
-                <a:latin typeface="Times New Roman Regular" panose="02020503050405090304" charset="0"/>
-                <a:cs typeface="Times New Roman Regular" panose="02020503050405090304" charset="0"/>
-              </a:rPr>
-              <a:t>Leveraging </a:t>
-            </a:r>
-            <a:r>
-              <a:rPr lang="en-US" altLang="zh-CN" sz="1600" b="1" dirty="0">
-                <a:latin typeface="Times New Roman" panose="02020503050405090304" pitchFamily="18" charset="0"/>
-                <a:cs typeface="Times New Roman" panose="02020503050405090304" pitchFamily="18" charset="0"/>
-              </a:rPr>
-              <a:t>Reasoning </a:t>
-            </a:r>
-            <a:r>
-              <a:rPr lang="en-US" altLang="zh-CN" sz="1600" b="1" dirty="0">
-                <a:latin typeface="Times New Roman Regular" panose="02020503050405090304" charset="0"/>
-                <a:cs typeface="Times New Roman Regular" panose="02020503050405090304" charset="0"/>
-              </a:rPr>
-              <a:t>Patterns</a:t>
-            </a:r>
           </a:p>
         </p:txBody>
       </p:sp>
@@ -6331,70 +6056,6 @@
           </p:txBody>
         </p:sp>
       </p:grpSp>
-      <p:sp>
-        <p:nvSpPr>
-          <p:cNvPr id="75" name="圆角矩形 74">
-            <a:extLst>
-              <a:ext uri="{FF2B5EF4-FFF2-40B4-BE49-F238E27FC236}">
-                <a16:creationId xmlns:a16="http://schemas.microsoft.com/office/drawing/2014/main" id="{9B7DF76D-1D30-8CBF-CFF2-025DD7A60871}"/>
-              </a:ext>
-            </a:extLst>
-          </p:cNvPr>
-          <p:cNvSpPr>
-            <a:spLocks noChangeAspect="1"/>
-          </p:cNvSpPr>
-          <p:nvPr/>
-        </p:nvSpPr>
-        <p:spPr>
-          <a:xfrm>
-            <a:off x="388542" y="2609282"/>
-            <a:ext cx="2583498" cy="1156970"/>
-          </a:xfrm>
-          <a:prstGeom prst="roundRect">
-            <a:avLst>
-              <a:gd name="adj" fmla="val 8221"/>
-            </a:avLst>
-          </a:prstGeom>
-          <a:solidFill>
-            <a:schemeClr val="bg1"/>
-          </a:solidFill>
-          <a:ln>
-            <a:solidFill>
-              <a:schemeClr val="accent1">
-                <a:lumMod val="60000"/>
-                <a:lumOff val="40000"/>
-              </a:schemeClr>
-            </a:solidFill>
-          </a:ln>
-        </p:spPr>
-        <p:style>
-          <a:lnRef idx="2">
-            <a:schemeClr val="accent1">
-              <a:lumMod val="75000"/>
-            </a:schemeClr>
-          </a:lnRef>
-          <a:fillRef idx="1">
-            <a:schemeClr val="accent1"/>
-          </a:fillRef>
-          <a:effectRef idx="0">
-            <a:srgbClr val="FFFFFF"/>
-          </a:effectRef>
-          <a:fontRef idx="minor">
-            <a:schemeClr val="lt1"/>
-          </a:fontRef>
-        </p:style>
-        <p:txBody>
-          <a:bodyPr rtlCol="0" anchor="ctr"/>
-          <a:lstStyle/>
-          <a:p>
-            <a:pPr algn="ctr"/>
-            <a:endParaRPr lang="zh-CN" altLang="en-US" sz="1855">
-              <a:latin typeface="Times New Roman Regular" panose="02020503050405090304" charset="0"/>
-              <a:cs typeface="Times New Roman Regular" panose="02020503050405090304" charset="0"/>
-            </a:endParaRPr>
-          </a:p>
-        </p:txBody>
-      </p:sp>
       <p:grpSp>
         <p:nvGrpSpPr>
           <p:cNvPr id="76" name="组合 75">
@@ -6412,9 +6073,9 @@
         <p:grpSpPr>
           <a:xfrm>
             <a:off x="835743" y="2634823"/>
-            <a:ext cx="1706343" cy="1021425"/>
+            <a:ext cx="1706343" cy="1084161"/>
             <a:chOff x="2233" y="4311"/>
-            <a:chExt cx="2578" cy="1563"/>
+            <a:chExt cx="2578" cy="1659"/>
           </a:xfrm>
         </p:grpSpPr>
         <p:sp>
@@ -6470,7 +6131,7 @@
           </p:nvSpPr>
           <p:spPr>
             <a:xfrm>
-              <a:off x="2824" y="4787"/>
+              <a:off x="2824" y="4883"/>
               <a:ext cx="1543" cy="481"/>
             </a:xfrm>
             <a:prstGeom prst="rect">
@@ -6508,7 +6169,7 @@
           </p:nvSpPr>
           <p:spPr>
             <a:xfrm>
-              <a:off x="2824" y="5393"/>
+              <a:off x="2824" y="5489"/>
               <a:ext cx="1987" cy="481"/>
             </a:xfrm>
             <a:prstGeom prst="rect">
@@ -6793,7 +6454,7 @@
         </p:blipFill>
         <p:spPr>
           <a:xfrm>
-            <a:off x="790036" y="3290770"/>
+            <a:off x="790036" y="3331590"/>
             <a:ext cx="453598" cy="453598"/>
           </a:xfrm>
           <a:prstGeom prst="rect">
@@ -6829,8 +6490,8 @@
         </p:blipFill>
         <p:spPr>
           <a:xfrm>
-            <a:off x="784305" y="2930762"/>
-            <a:ext cx="514626" cy="378402"/>
+            <a:off x="784306" y="2979746"/>
+            <a:ext cx="489599" cy="360000"/>
           </a:xfrm>
           <a:prstGeom prst="rect">
             <a:avLst/>
@@ -9240,8 +8901,8 @@
         </p:blipFill>
         <p:spPr>
           <a:xfrm>
-            <a:off x="3663435" y="2667369"/>
-            <a:ext cx="514626" cy="378402"/>
+            <a:off x="3663436" y="2667369"/>
+            <a:ext cx="489599" cy="360000"/>
           </a:xfrm>
           <a:prstGeom prst="rect">
             <a:avLst/>
@@ -9276,8 +8937,8 @@
         </p:blipFill>
         <p:spPr>
           <a:xfrm>
-            <a:off x="3585472" y="3753412"/>
-            <a:ext cx="514626" cy="378402"/>
+            <a:off x="3585473" y="3753412"/>
+            <a:ext cx="489599" cy="360000"/>
           </a:xfrm>
           <a:prstGeom prst="rect">
             <a:avLst/>
@@ -9883,6 +9544,114 @@
           </a:p>
         </p:txBody>
       </p:sp>
+      <p:pic>
+        <p:nvPicPr>
+          <p:cNvPr id="129" name="图形 128">
+            <a:extLst>
+              <a:ext uri="{FF2B5EF4-FFF2-40B4-BE49-F238E27FC236}">
+                <a16:creationId xmlns:a16="http://schemas.microsoft.com/office/drawing/2014/main" id="{90A71763-2D64-41FE-A4EC-7B8F65783665}"/>
+              </a:ext>
+            </a:extLst>
+          </p:cNvPr>
+          <p:cNvPicPr>
+            <a:picLocks noChangeAspect="1"/>
+          </p:cNvPicPr>
+          <p:nvPr/>
+        </p:nvPicPr>
+        <p:blipFill>
+          <a:blip r:embed="rId15">
+            <a:extLst>
+              <a:ext uri="{96DAC541-7B7A-43D3-8B79-37D633B846F1}">
+                <asvg:svgBlip xmlns:asvg="http://schemas.microsoft.com/office/drawing/2016/SVG/main" r:embed="rId16"/>
+              </a:ext>
+            </a:extLst>
+          </a:blip>
+          <a:stretch>
+            <a:fillRect/>
+          </a:stretch>
+        </p:blipFill>
+        <p:spPr>
+          <a:xfrm>
+            <a:off x="9706108" y="3315047"/>
+            <a:ext cx="489599" cy="360000"/>
+          </a:xfrm>
+          <a:prstGeom prst="rect">
+            <a:avLst/>
+          </a:prstGeom>
+        </p:spPr>
+      </p:pic>
+      <p:pic>
+        <p:nvPicPr>
+          <p:cNvPr id="130" name="图片 146" descr="zhipu-color">
+            <a:extLst>
+              <a:ext uri="{FF2B5EF4-FFF2-40B4-BE49-F238E27FC236}">
+                <a16:creationId xmlns:a16="http://schemas.microsoft.com/office/drawing/2014/main" id="{A90E9632-0E36-44FA-B66C-A2DAB3262A9E}"/>
+              </a:ext>
+            </a:extLst>
+          </p:cNvPr>
+          <p:cNvPicPr>
+            <a:picLocks noChangeAspect="1"/>
+          </p:cNvPicPr>
+          <p:nvPr/>
+        </p:nvPicPr>
+        <p:blipFill>
+          <a:blip r:embed="rId21">
+            <a:extLst>
+              <a:ext uri="{96DAC541-7B7A-43D3-8B79-37D633B846F1}">
+                <asvg:svgBlip xmlns:asvg="http://schemas.microsoft.com/office/drawing/2016/SVG/main" r:embed="rId22"/>
+              </a:ext>
+            </a:extLst>
+          </a:blip>
+          <a:stretch>
+            <a:fillRect/>
+          </a:stretch>
+        </p:blipFill>
+        <p:spPr>
+          <a:xfrm>
+            <a:off x="11175514" y="3290976"/>
+            <a:ext cx="407071" cy="408142"/>
+          </a:xfrm>
+          <a:prstGeom prst="rect">
+            <a:avLst/>
+          </a:prstGeom>
+        </p:spPr>
+      </p:pic>
+      <p:pic>
+        <p:nvPicPr>
+          <p:cNvPr id="132" name="图形 131">
+            <a:extLst>
+              <a:ext uri="{FF2B5EF4-FFF2-40B4-BE49-F238E27FC236}">
+                <a16:creationId xmlns:a16="http://schemas.microsoft.com/office/drawing/2014/main" id="{53614BEA-EBF1-47AD-8CF7-2E4CB1890727}"/>
+              </a:ext>
+            </a:extLst>
+          </p:cNvPr>
+          <p:cNvPicPr>
+            <a:picLocks noChangeAspect="1"/>
+          </p:cNvPicPr>
+          <p:nvPr/>
+        </p:nvPicPr>
+        <p:blipFill>
+          <a:blip r:embed="rId13">
+            <a:extLst>
+              <a:ext uri="{96DAC541-7B7A-43D3-8B79-37D633B846F1}">
+                <asvg:svgBlip xmlns:asvg="http://schemas.microsoft.com/office/drawing/2016/SVG/main" r:embed="rId14"/>
+              </a:ext>
+            </a:extLst>
+          </a:blip>
+          <a:stretch>
+            <a:fillRect/>
+          </a:stretch>
+        </p:blipFill>
+        <p:spPr>
+          <a:xfrm>
+            <a:off x="10244525" y="3268248"/>
+            <a:ext cx="453598" cy="453598"/>
+          </a:xfrm>
+          <a:prstGeom prst="rect">
+            <a:avLst/>
+          </a:prstGeom>
+        </p:spPr>
+      </p:pic>
       <p:sp>
         <p:nvSpPr>
           <p:cNvPr id="294" name="文本框 293">
@@ -10010,6 +9779,381 @@
           </a:fontRef>
         </p:style>
       </p:cxnSp>
+      <p:sp>
+        <p:nvSpPr>
+          <p:cNvPr id="75" name="圆角矩形 74">
+            <a:extLst>
+              <a:ext uri="{FF2B5EF4-FFF2-40B4-BE49-F238E27FC236}">
+                <a16:creationId xmlns:a16="http://schemas.microsoft.com/office/drawing/2014/main" id="{9B7DF76D-1D30-8CBF-CFF2-025DD7A60871}"/>
+              </a:ext>
+            </a:extLst>
+          </p:cNvPr>
+          <p:cNvSpPr>
+            <a:spLocks noChangeAspect="1"/>
+          </p:cNvSpPr>
+          <p:nvPr/>
+        </p:nvSpPr>
+        <p:spPr>
+          <a:xfrm>
+            <a:off x="388542" y="2609282"/>
+            <a:ext cx="2583498" cy="1156970"/>
+          </a:xfrm>
+          <a:prstGeom prst="roundRect">
+            <a:avLst>
+              <a:gd name="adj" fmla="val 8221"/>
+            </a:avLst>
+          </a:prstGeom>
+          <a:noFill/>
+          <a:ln>
+            <a:solidFill>
+              <a:schemeClr val="accent1">
+                <a:lumMod val="60000"/>
+                <a:lumOff val="40000"/>
+              </a:schemeClr>
+            </a:solidFill>
+          </a:ln>
+        </p:spPr>
+        <p:style>
+          <a:lnRef idx="2">
+            <a:schemeClr val="accent1">
+              <a:lumMod val="75000"/>
+            </a:schemeClr>
+          </a:lnRef>
+          <a:fillRef idx="1">
+            <a:schemeClr val="accent1"/>
+          </a:fillRef>
+          <a:effectRef idx="0">
+            <a:srgbClr val="FFFFFF"/>
+          </a:effectRef>
+          <a:fontRef idx="minor">
+            <a:schemeClr val="lt1"/>
+          </a:fontRef>
+        </p:style>
+        <p:txBody>
+          <a:bodyPr rtlCol="0" anchor="ctr"/>
+          <a:lstStyle/>
+          <a:p>
+            <a:pPr algn="ctr"/>
+            <a:endParaRPr lang="zh-CN" altLang="en-US" sz="1855">
+              <a:latin typeface="Times New Roman Regular" panose="02020503050405090304" charset="0"/>
+              <a:cs typeface="Times New Roman Regular" panose="02020503050405090304" charset="0"/>
+            </a:endParaRPr>
+          </a:p>
+        </p:txBody>
+      </p:sp>
+      <p:sp>
+        <p:nvSpPr>
+          <p:cNvPr id="52" name="矩形: 圆角 63">
+            <a:extLst>
+              <a:ext uri="{FF2B5EF4-FFF2-40B4-BE49-F238E27FC236}">
+                <a16:creationId xmlns:a16="http://schemas.microsoft.com/office/drawing/2014/main" id="{FB1F223D-8C12-EDCA-B148-8AD2E70B4924}"/>
+              </a:ext>
+            </a:extLst>
+          </p:cNvPr>
+          <p:cNvSpPr>
+            <a:spLocks noChangeAspect="1"/>
+          </p:cNvSpPr>
+          <p:nvPr/>
+        </p:nvSpPr>
+        <p:spPr>
+          <a:xfrm>
+            <a:off x="9423253" y="3698877"/>
+            <a:ext cx="2896870" cy="1674495"/>
+          </a:xfrm>
+          <a:prstGeom prst="roundRect">
+            <a:avLst>
+              <a:gd name="adj" fmla="val 0"/>
+            </a:avLst>
+          </a:prstGeom>
+          <a:solidFill>
+            <a:srgbClr val="F9F9F9"/>
+          </a:solidFill>
+          <a:ln w="19050">
+            <a:solidFill>
+              <a:schemeClr val="accent1">
+                <a:lumMod val="20000"/>
+                <a:lumOff val="80000"/>
+              </a:schemeClr>
+            </a:solidFill>
+            <a:prstDash val="sysDash"/>
+          </a:ln>
+        </p:spPr>
+        <p:style>
+          <a:lnRef idx="2">
+            <a:schemeClr val="accent1">
+              <a:shade val="15000"/>
+            </a:schemeClr>
+          </a:lnRef>
+          <a:fillRef idx="1">
+            <a:schemeClr val="accent1"/>
+          </a:fillRef>
+          <a:effectRef idx="0">
+            <a:schemeClr val="accent1"/>
+          </a:effectRef>
+          <a:fontRef idx="minor">
+            <a:schemeClr val="lt1"/>
+          </a:fontRef>
+        </p:style>
+        <p:txBody>
+          <a:bodyPr rtlCol="0" anchor="ctr"/>
+          <a:lstStyle/>
+          <a:p>
+            <a:pPr algn="ctr"/>
+            <a:endParaRPr lang="zh-CN" altLang="en-US" sz="1855" dirty="0">
+              <a:latin typeface="Times New Roman Regular" panose="02020503050405090304" charset="0"/>
+              <a:cs typeface="Times New Roman Regular" panose="02020503050405090304" charset="0"/>
+            </a:endParaRPr>
+          </a:p>
+        </p:txBody>
+      </p:sp>
+      <p:grpSp>
+        <p:nvGrpSpPr>
+          <p:cNvPr id="187" name="组合 186">
+            <a:extLst>
+              <a:ext uri="{FF2B5EF4-FFF2-40B4-BE49-F238E27FC236}">
+                <a16:creationId xmlns:a16="http://schemas.microsoft.com/office/drawing/2014/main" id="{2A64BC5F-5062-7446-7B80-CE5ACA0083D8}"/>
+              </a:ext>
+            </a:extLst>
+          </p:cNvPr>
+          <p:cNvGrpSpPr>
+            <a:grpSpLocks noChangeAspect="1"/>
+          </p:cNvGrpSpPr>
+          <p:nvPr/>
+        </p:nvGrpSpPr>
+        <p:grpSpPr>
+          <a:xfrm>
+            <a:off x="9570875" y="4141539"/>
+            <a:ext cx="2567541" cy="1098550"/>
+            <a:chOff x="14270" y="1858"/>
+            <a:chExt cx="4067" cy="978"/>
+          </a:xfrm>
+        </p:grpSpPr>
+        <p:sp>
+          <p:nvSpPr>
+            <p:cNvPr id="188" name="圆角矩形 187">
+              <a:extLst>
+                <a:ext uri="{FF2B5EF4-FFF2-40B4-BE49-F238E27FC236}">
+                  <a16:creationId xmlns:a16="http://schemas.microsoft.com/office/drawing/2014/main" id="{C4A9DB26-ED52-BBC6-FBD9-A55268CAC0B7}"/>
+                </a:ext>
+              </a:extLst>
+            </p:cNvPr>
+            <p:cNvSpPr/>
+            <p:nvPr/>
+          </p:nvSpPr>
+          <p:spPr>
+            <a:xfrm>
+              <a:off x="14270" y="1858"/>
+              <a:ext cx="4047" cy="978"/>
+            </a:xfrm>
+            <a:prstGeom prst="roundRect">
+              <a:avLst>
+                <a:gd name="adj" fmla="val 11118"/>
+              </a:avLst>
+            </a:prstGeom>
+            <a:solidFill>
+              <a:srgbClr val="F5FAF4"/>
+            </a:solidFill>
+            <a:ln>
+              <a:solidFill>
+                <a:srgbClr val="678E61"/>
+              </a:solidFill>
+            </a:ln>
+          </p:spPr>
+          <p:style>
+            <a:lnRef idx="2">
+              <a:schemeClr val="accent1">
+                <a:lumMod val="75000"/>
+              </a:schemeClr>
+            </a:lnRef>
+            <a:fillRef idx="1">
+              <a:schemeClr val="accent1"/>
+            </a:fillRef>
+            <a:effectRef idx="0">
+              <a:srgbClr val="FFFFFF"/>
+            </a:effectRef>
+            <a:fontRef idx="minor">
+              <a:schemeClr val="lt1"/>
+            </a:fontRef>
+          </p:style>
+          <p:txBody>
+            <a:bodyPr rtlCol="0" anchor="ctr"/>
+            <a:lstStyle/>
+            <a:p>
+              <a:pPr algn="ctr"/>
+              <a:endParaRPr lang="zh-CN" altLang="en-US" sz="1855">
+                <a:latin typeface="Times New Roman Regular" panose="02020503050405090304" charset="0"/>
+                <a:cs typeface="Times New Roman Regular" panose="02020503050405090304" charset="0"/>
+              </a:endParaRPr>
+            </a:p>
+          </p:txBody>
+        </p:sp>
+        <p:sp>
+          <p:nvSpPr>
+            <p:cNvPr id="189" name="文本框 188">
+              <a:extLst>
+                <a:ext uri="{FF2B5EF4-FFF2-40B4-BE49-F238E27FC236}">
+                  <a16:creationId xmlns:a16="http://schemas.microsoft.com/office/drawing/2014/main" id="{C9564729-7407-D016-4EE4-853B5A5B700A}"/>
+                </a:ext>
+              </a:extLst>
+            </p:cNvPr>
+            <p:cNvSpPr txBox="1"/>
+            <p:nvPr/>
+          </p:nvSpPr>
+          <p:spPr>
+            <a:xfrm>
+              <a:off x="14337" y="1910"/>
+              <a:ext cx="4000" cy="906"/>
+            </a:xfrm>
+            <a:prstGeom prst="rect">
+              <a:avLst/>
+            </a:prstGeom>
+            <a:noFill/>
+          </p:spPr>
+          <p:txBody>
+            <a:bodyPr wrap="square" rtlCol="0">
+              <a:noAutofit/>
+            </a:bodyPr>
+            <a:lstStyle/>
+            <a:p>
+              <a:r>
+                <a:rPr lang="en-US" altLang="zh-CN" sz="1600" b="1" dirty="0">
+                  <a:solidFill>
+                    <a:srgbClr val="396135"/>
+                  </a:solidFill>
+                  <a:latin typeface="Times New Roman Regular" panose="02020503050405090304" charset="0"/>
+                  <a:cs typeface="Times New Roman Regular" panose="02020503050405090304" charset="0"/>
+                </a:rPr>
+                <a:t>RQ3: Pattern Applications</a:t>
+              </a:r>
+            </a:p>
+            <a:p>
+              <a:pPr marL="90488" indent="90488">
+                <a:spcBef>
+                  <a:spcPts val="600"/>
+                </a:spcBef>
+              </a:pPr>
+              <a:r>
+                <a:rPr lang="en-US" altLang="zh-CN" sz="1400" dirty="0">
+                  <a:latin typeface="Times New Roman Regular" panose="02020503050405090304" charset="0"/>
+                  <a:cs typeface="Times New Roman Regular" panose="02020503050405090304" charset="0"/>
+                </a:rPr>
+                <a:t>coding task identification</a:t>
+              </a:r>
+            </a:p>
+            <a:p>
+              <a:pPr marL="90488" indent="90488"/>
+              <a:r>
+                <a:rPr lang="en-US" altLang="zh-CN" sz="1400" dirty="0">
+                  <a:latin typeface="Times New Roman Regular" panose="02020503050405090304" charset="0"/>
+                  <a:cs typeface="Times New Roman Regular" panose="02020503050405090304" charset="0"/>
+                </a:rPr>
+                <a:t>pattern-guided prompting</a:t>
+              </a:r>
+            </a:p>
+            <a:p>
+              <a:pPr marL="90488" indent="90488"/>
+              <a:r>
+                <a:rPr lang="en-US" altLang="zh-CN" sz="1400" dirty="0">
+                  <a:latin typeface="Times New Roman Regular" panose="02020503050405090304" charset="0"/>
+                  <a:cs typeface="Times New Roman Regular" panose="02020503050405090304" charset="0"/>
+                </a:rPr>
+                <a:t>pattern-aware early stopping</a:t>
+              </a:r>
+            </a:p>
+          </p:txBody>
+        </p:sp>
+      </p:grpSp>
+      <p:sp>
+        <p:nvSpPr>
+          <p:cNvPr id="54" name="文本框 53">
+            <a:extLst>
+              <a:ext uri="{FF2B5EF4-FFF2-40B4-BE49-F238E27FC236}">
+                <a16:creationId xmlns:a16="http://schemas.microsoft.com/office/drawing/2014/main" id="{BFC74964-D453-8E2F-AE4A-C5E0D35617AC}"/>
+              </a:ext>
+            </a:extLst>
+          </p:cNvPr>
+          <p:cNvSpPr txBox="1">
+            <a:spLocks noChangeAspect="1"/>
+          </p:cNvSpPr>
+          <p:nvPr/>
+        </p:nvSpPr>
+        <p:spPr>
+          <a:xfrm>
+            <a:off x="9216589" y="3701484"/>
+            <a:ext cx="3278505" cy="338554"/>
+          </a:xfrm>
+          <a:prstGeom prst="rect">
+            <a:avLst/>
+          </a:prstGeom>
+          <a:noFill/>
+        </p:spPr>
+        <p:txBody>
+          <a:bodyPr wrap="square" rtlCol="0">
+            <a:spAutoFit/>
+          </a:bodyPr>
+          <a:lstStyle/>
+          <a:p>
+            <a:pPr algn="ctr"/>
+            <a:r>
+              <a:rPr lang="en-US" altLang="zh-CN" sz="1600" b="1" dirty="0">
+                <a:latin typeface="Times New Roman Regular" panose="02020503050405090304" charset="0"/>
+                <a:cs typeface="Times New Roman Regular" panose="02020503050405090304" charset="0"/>
+              </a:rPr>
+              <a:t>Leveraging </a:t>
+            </a:r>
+            <a:r>
+              <a:rPr lang="en-US" altLang="zh-CN" sz="1600" b="1" dirty="0">
+                <a:latin typeface="Times New Roman" panose="02020503050405090304" pitchFamily="18" charset="0"/>
+                <a:cs typeface="Times New Roman" panose="02020503050405090304" pitchFamily="18" charset="0"/>
+              </a:rPr>
+              <a:t>Reasoning </a:t>
+            </a:r>
+            <a:r>
+              <a:rPr lang="en-US" altLang="zh-CN" sz="1600" b="1" dirty="0">
+                <a:latin typeface="Times New Roman Regular" panose="02020503050405090304" charset="0"/>
+                <a:cs typeface="Times New Roman Regular" panose="02020503050405090304" charset="0"/>
+              </a:rPr>
+              <a:t>Patterns</a:t>
+            </a:r>
+          </a:p>
+        </p:txBody>
+      </p:sp>
+      <p:pic>
+        <p:nvPicPr>
+          <p:cNvPr id="6" name="图形 5">
+            <a:extLst>
+              <a:ext uri="{FF2B5EF4-FFF2-40B4-BE49-F238E27FC236}">
+                <a16:creationId xmlns:a16="http://schemas.microsoft.com/office/drawing/2014/main" id="{F7383158-1FA6-A80F-E3E9-0EA480EF6FAD}"/>
+              </a:ext>
+            </a:extLst>
+          </p:cNvPr>
+          <p:cNvPicPr>
+            <a:picLocks noChangeAspect="1"/>
+          </p:cNvPicPr>
+          <p:nvPr/>
+        </p:nvPicPr>
+        <p:blipFill>
+          <a:blip r:embed="rId15">
+            <a:extLst>
+              <a:ext uri="{96DAC541-7B7A-43D3-8B79-37D633B846F1}">
+                <asvg:svgBlip xmlns:asvg="http://schemas.microsoft.com/office/drawing/2016/SVG/main" r:embed="rId16"/>
+              </a:ext>
+            </a:extLst>
+          </a:blip>
+          <a:stretch>
+            <a:fillRect/>
+          </a:stretch>
+        </p:blipFill>
+        <p:spPr>
+          <a:xfrm>
+            <a:off x="11640821" y="3303563"/>
+            <a:ext cx="489599" cy="360000"/>
+          </a:xfrm>
+          <a:prstGeom prst="rect">
+            <a:avLst/>
+          </a:prstGeom>
+        </p:spPr>
+      </p:pic>
     </p:spTree>
     <p:extLst>
       <p:ext uri="{BB962C8B-B14F-4D97-AF65-F5344CB8AC3E}">
